--- a/docs/examples/frameworks.pptx
+++ b/docs/examples/frameworks.pptx
@@ -803,7 +803,7 @@
           <a:lstStyle/>
           <a:p>
             <a:r>
-              <a:t>Each row is one change. Triage is the change that frees the most time.</a:t>
+              <a:t>Each row is one change. Approval is the change that frees the most time.</a:t>
             </a:r>
           </a:p>
         </p:txBody>
@@ -5084,7 +5084,7 @@
                 <a:ea typeface="Malgun Gothic"/>
                 <a:cs typeface="Arial"/>
               </a:rPr>
-              <a:t>Start automation where value is high and adoption is easy</a:t>
+              <a:t>Start automation where impact is high and effort is low</a:t>
             </a:r>
           </a:p>
         </p:txBody>
@@ -5897,7 +5897,7 @@
                           <a:ea typeface="Malgun Gothic"/>
                           <a:cs typeface="Arial"/>
                         </a:rPr>
-                        <a:t>Works with the ticket tool</a:t>
+                        <a:t>Works with the finance system</a:t>
                       </a:r>
                     </a:p>
                   </a:txBody>
@@ -10525,7 +10525,7 @@
                 <a:ea typeface="Malgun Gothic"/>
                 <a:cs typeface="Arial"/>
               </a:rPr>
-              <a:t>Triage</a:t>
+              <a:t>Approval</a:t>
             </a:r>
           </a:p>
         </p:txBody>
@@ -10566,7 +10566,7 @@
                 <a:ea typeface="Malgun Gothic"/>
                 <a:cs typeface="Arial"/>
               </a:rPr>
-              <a:t>A person sorts </a:t>
+              <a:t>A person checks </a:t>
             </a:r>
             <a:r>
               <a:rPr sz="1300" b="1" i="0">
@@ -10588,7 +10588,7 @@
                 <a:ea typeface="Malgun Gothic"/>
                 <a:cs typeface="Arial"/>
               </a:rPr>
-              <a:t> request</a:t>
+              <a:t> claim</a:t>
             </a:r>
           </a:p>
         </p:txBody>
@@ -10660,7 +10660,7 @@
                 <a:ea typeface="Malgun Gothic"/>
                 <a:cs typeface="Arial"/>
               </a:rPr>
-              <a:t>Software sorts, a person </a:t>
+              <a:t>Software checks, a person </a:t>
             </a:r>
             <a:r>
               <a:rPr sz="1300" b="1" i="0">
@@ -10671,7 +10671,18 @@
                 <a:ea typeface="Malgun Gothic"/>
                 <a:cs typeface="Arial"/>
               </a:rPr>
-              <a:t>checks</a:t>
+              <a:t>decides</a:t>
+            </a:r>
+            <a:r>
+              <a:rPr sz="1300" b="0" i="0">
+                <a:solidFill>
+                  <a:srgbClr val="1F2328"/>
+                </a:solidFill>
+                <a:latin typeface="Arial"/>
+                <a:ea typeface="Malgun Gothic"/>
+                <a:cs typeface="Arial"/>
+              </a:rPr>
+              <a:t> exceptions</a:t>
             </a:r>
           </a:p>
         </p:txBody>
@@ -18116,7 +18127,7 @@
                 <a:ea typeface="Malgun Gothic"/>
                 <a:cs typeface="Arial"/>
               </a:rPr>
-              <a:t>tickets triaged per week</a:t>
+              <a:t>expense claims per week</a:t>
             </a:r>
           </a:p>
         </p:txBody>
@@ -18219,7 +18230,7 @@
                 <a:ea typeface="Malgun Gothic"/>
                 <a:cs typeface="Arial"/>
               </a:rPr>
-              <a:t>median triage time</a:t>
+              <a:t>median approval time</a:t>
             </a:r>
           </a:p>
         </p:txBody>
@@ -18301,7 +18312,7 @@
                 <a:ea typeface="Malgun Gothic"/>
                 <a:cs typeface="Arial"/>
               </a:rPr>
-              <a:t>triage accuracy on checked samples</a:t>
+              <a:t>claims passing automatic checks</a:t>
             </a:r>
           </a:p>
         </p:txBody>
@@ -18962,7 +18973,7 @@
                 <a:ea typeface="Malgun Gothic"/>
                 <a:cs typeface="Arial"/>
               </a:rPr>
-              <a:t>Automate invoice matching and ticket triage first</a:t>
+              <a:t>Automate invoice matching and expense approvals first</a:t>
             </a:r>
           </a:p>
         </p:txBody>
@@ -19238,7 +19249,7 @@
                 <a:ea typeface="Malgun Gothic"/>
                 <a:cs typeface="Arial"/>
               </a:rPr>
-              <a:t>Two workflows combine high value with easy adoption</a:t>
+              <a:t>Two workflows combine high impact with low effort</a:t>
             </a:r>
           </a:p>
           <a:p>
@@ -19879,7 +19890,7 @@
                 <a:ea typeface="Malgun Gothic"/>
                 <a:cs typeface="Arial"/>
               </a:rPr>
-              <a:t>Two workflows combine high value with easy adoption</a:t>
+              <a:t>Two workflows combine high impact with low effort</a:t>
             </a:r>
           </a:p>
         </p:txBody>
@@ -19915,14 +19926,88 @@
       </p:sp>
       <p:sp>
         <p:nvSpPr>
-          <p:cNvPr id="5" name="Commentary rule"/>
+          <p:cNvPr id="5" name="Commentary"/>
+          <p:cNvSpPr txBox="1"/>
+          <p:nvPr/>
+        </p:nvSpPr>
+        <p:spPr>
+          <a:xfrm>
+            <a:off x="8161866" y="1422400"/>
+            <a:ext cx="3217333" cy="877823"/>
+          </a:xfrm>
+          <a:prstGeom prst="rect">
+            <a:avLst/>
+          </a:prstGeom>
+          <a:noFill/>
+        </p:spPr>
+        <p:txBody>
+          <a:bodyPr wrap="square" lIns="0" tIns="0" rIns="0" bIns="0" anchor="t">
+            <a:noAutofit/>
+          </a:bodyPr>
+          <a:lstStyle/>
+          <a:p>
+            <a:pPr algn="l">
+              <a:lnSpc>
+                <a:spcPct val="120000"/>
+              </a:lnSpc>
+            </a:pPr>
+            <a:r>
+              <a:rPr sz="1600" b="1" i="0">
+                <a:solidFill>
+                  <a:srgbClr val="2F5BD3"/>
+                </a:solidFill>
+                <a:latin typeface="Arial"/>
+                <a:ea typeface="Malgun Gothic"/>
+                <a:cs typeface="Arial"/>
+              </a:rPr>
+              <a:t>Invoice matching</a:t>
+            </a:r>
+            <a:r>
+              <a:rPr sz="1600" b="0" i="0">
+                <a:solidFill>
+                  <a:srgbClr val="1F2328"/>
+                </a:solidFill>
+                <a:latin typeface="Arial"/>
+                <a:ea typeface="Malgun Gothic"/>
+                <a:cs typeface="Arial"/>
+              </a:rPr>
+              <a:t> and </a:t>
+            </a:r>
+            <a:r>
+              <a:rPr sz="1600" b="1" i="0">
+                <a:solidFill>
+                  <a:srgbClr val="2F5BD3"/>
+                </a:solidFill>
+                <a:latin typeface="Arial"/>
+                <a:ea typeface="Malgun Gothic"/>
+                <a:cs typeface="Arial"/>
+              </a:rPr>
+              <a:t>expense approvals</a:t>
+            </a:r>
+            <a:r>
+              <a:rPr sz="1600" b="0" i="0">
+                <a:solidFill>
+                  <a:srgbClr val="1F2328"/>
+                </a:solidFill>
+                <a:latin typeface="Arial"/>
+                <a:ea typeface="Malgun Gothic"/>
+                <a:cs typeface="Arial"/>
+              </a:rPr>
+              <a:t> are the only candidates with high impact for low effort.</a:t>
+            </a:r>
+          </a:p>
+        </p:txBody>
+      </p:sp>
+      <p:sp>
+        <p:nvSpPr>
+          <p:cNvPr id="6" name="Commentary rule"/>
           <p:cNvSpPr/>
           <p:nvPr/>
         </p:nvSpPr>
         <p:spPr>
           <a:xfrm>
             <a:off x="8009466" y="1422400"/>
-            <a:ext cx="25400" cy="877823"/>
+            <a:ext cx="25400" cy="877824"/>
           </a:xfrm>
           <a:prstGeom prst="rect">
             <a:avLst/>
@@ -19944,80 +20029,6 @@
       </p:sp>
       <p:sp>
         <p:nvSpPr>
-          <p:cNvPr id="6" name="Commentary"/>
-          <p:cNvSpPr txBox="1"/>
-          <p:nvPr/>
-        </p:nvSpPr>
-        <p:spPr>
-          <a:xfrm>
-            <a:off x="8161866" y="1422400"/>
-            <a:ext cx="3217333" cy="877823"/>
-          </a:xfrm>
-          <a:prstGeom prst="rect">
-            <a:avLst/>
-          </a:prstGeom>
-          <a:noFill/>
-        </p:spPr>
-        <p:txBody>
-          <a:bodyPr wrap="square" lIns="0" tIns="0" rIns="0" bIns="0" anchor="t">
-            <a:noAutofit/>
-          </a:bodyPr>
-          <a:lstStyle/>
-          <a:p>
-            <a:pPr algn="l">
-              <a:lnSpc>
-                <a:spcPct val="120000"/>
-              </a:lnSpc>
-            </a:pPr>
-            <a:r>
-              <a:rPr sz="1600" b="1" i="0">
-                <a:solidFill>
-                  <a:srgbClr val="2F5BD3"/>
-                </a:solidFill>
-                <a:latin typeface="Arial"/>
-                <a:ea typeface="Malgun Gothic"/>
-                <a:cs typeface="Arial"/>
-              </a:rPr>
-              <a:t>Invoice matching</a:t>
-            </a:r>
-            <a:r>
-              <a:rPr sz="1600" b="0" i="0">
-                <a:solidFill>
-                  <a:srgbClr val="1F2328"/>
-                </a:solidFill>
-                <a:latin typeface="Arial"/>
-                <a:ea typeface="Malgun Gothic"/>
-                <a:cs typeface="Arial"/>
-              </a:rPr>
-              <a:t> and </a:t>
-            </a:r>
-            <a:r>
-              <a:rPr sz="1600" b="1" i="0">
-                <a:solidFill>
-                  <a:srgbClr val="2F5BD3"/>
-                </a:solidFill>
-                <a:latin typeface="Arial"/>
-                <a:ea typeface="Malgun Gothic"/>
-                <a:cs typeface="Arial"/>
-              </a:rPr>
-              <a:t>ticket triage</a:t>
-            </a:r>
-            <a:r>
-              <a:rPr sz="1600" b="0" i="0">
-                <a:solidFill>
-                  <a:srgbClr val="1F2328"/>
-                </a:solidFill>
-                <a:latin typeface="Arial"/>
-                <a:ea typeface="Malgun Gothic"/>
-                <a:cs typeface="Arial"/>
-              </a:rPr>
-              <a:t> are the only candidates that are both valuable and ready.</a:t>
-            </a:r>
-          </a:p>
-        </p:txBody>
-      </p:sp>
-      <p:sp>
-        <p:nvSpPr>
           <p:cNvPr id="7" name="Tag"/>
           <p:cNvSpPr/>
           <p:nvPr/>
@@ -20166,7 +20177,7 @@
                 <a:ea typeface="Malgun Gothic"/>
                 <a:cs typeface="Arial"/>
               </a:rPr>
-              <a:t>High value but needs process change first</a:t>
+              <a:t>High impact but needs process change first</a:t>
             </a:r>
           </a:p>
         </p:txBody>
@@ -20335,7 +20346,7 @@
                 <a:ea typeface="Malgun Gothic"/>
                 <a:cs typeface="Arial"/>
               </a:rPr>
-              <a:t>High value and ready to adopt</a:t>
+              <a:t>High impact for little effort</a:t>
             </a:r>
           </a:p>
         </p:txBody>
@@ -20447,7 +20458,7 @@
                 <a:ea typeface="Malgun Gothic"/>
                 <a:cs typeface="Arial"/>
               </a:rPr>
-              <a:t>  Ticket triage</a:t>
+              <a:t>  Expense approvals</a:t>
             </a:r>
           </a:p>
         </p:txBody>
@@ -20558,7 +20569,7 @@
                 <a:ea typeface="Malgun Gothic"/>
                 <a:cs typeface="Arial"/>
               </a:rPr>
-              <a:t>Little value and hard to adopt</a:t>
+              <a:t>Little impact for a lot of effort</a:t>
             </a:r>
           </a:p>
         </p:txBody>
@@ -20725,7 +20736,7 @@
                 <a:ea typeface="Malgun Gothic"/>
                 <a:cs typeface="Arial"/>
               </a:rPr>
-              <a:t>Easy, but small gains</a:t>
+              <a:t>Little effort, small gains</a:t>
             </a:r>
           </a:p>
         </p:txBody>
@@ -20895,7 +20906,7 @@
         <p:spPr>
           <a:xfrm>
             <a:off x="1112520" y="5694680"/>
-            <a:ext cx="441316" cy="223520"/>
+            <a:ext cx="423952" cy="223520"/>
           </a:xfrm>
           <a:prstGeom prst="rect">
             <a:avLst/>
@@ -20922,7 +20933,7 @@
                 <a:ea typeface="Malgun Gothic"/>
                 <a:cs typeface="Arial"/>
               </a:rPr>
-              <a:t>Hard</a:t>
+              <a:t>High</a:t>
             </a:r>
           </a:p>
         </p:txBody>
@@ -20935,8 +20946,8 @@
         </p:nvSpPr>
         <p:spPr>
           <a:xfrm>
-            <a:off x="3807689" y="5694680"/>
-            <a:ext cx="1278008" cy="223520"/>
+            <a:off x="3739652" y="5694680"/>
+            <a:ext cx="1414081" cy="223520"/>
           </a:xfrm>
           <a:prstGeom prst="rect">
             <a:avLst/>
@@ -20963,7 +20974,7 @@
                 <a:ea typeface="Malgun Gothic"/>
                 <a:cs typeface="Arial"/>
               </a:rPr>
-              <a:t>Ease of adoption</a:t>
+              <a:t>Effort to implement</a:t>
             </a:r>
           </a:p>
         </p:txBody>
@@ -20976,8 +20987,8 @@
         </p:nvSpPr>
         <p:spPr>
           <a:xfrm>
-            <a:off x="7330806" y="5694680"/>
-            <a:ext cx="450060" cy="223520"/>
+            <a:off x="7391740" y="5694680"/>
+            <a:ext cx="389126" cy="223520"/>
           </a:xfrm>
           <a:prstGeom prst="rect">
             <a:avLst/>
@@ -21004,7 +21015,7 @@
                 <a:ea typeface="Malgun Gothic"/>
                 <a:cs typeface="Arial"/>
               </a:rPr>
-              <a:t>Easy</a:t>
+              <a:t>Low</a:t>
             </a:r>
           </a:p>
         </p:txBody>
@@ -21058,8 +21069,8 @@
         </p:nvSpPr>
         <p:spPr>
           <a:xfrm rot="16200000">
-            <a:off x="130232" y="3586479"/>
-            <a:ext cx="1588654" cy="223520"/>
+            <a:off x="294421" y="3586479"/>
+            <a:ext cx="1260276" cy="223520"/>
           </a:xfrm>
           <a:prstGeom prst="rect">
             <a:avLst/>
@@ -21086,7 +21097,7 @@
                 <a:ea typeface="Malgun Gothic"/>
                 <a:cs typeface="Arial"/>
               </a:rPr>
-              <a:t>Value to the business</a:t>
+              <a:t>Expected impact</a:t>
             </a:r>
           </a:p>
         </p:txBody>
@@ -21739,8 +21750,8 @@
         </p:nvSpPr>
         <p:spPr>
           <a:xfrm>
-            <a:off x="5310721" y="5370830"/>
-            <a:ext cx="1870277" cy="223520"/>
+            <a:off x="5084312" y="5370830"/>
+            <a:ext cx="2323094" cy="223520"/>
           </a:xfrm>
           <a:prstGeom prst="rect">
             <a:avLst/>
@@ -21767,7 +21778,7 @@
                 <a:ea typeface="Malgun Gothic"/>
                 <a:cs typeface="Arial"/>
               </a:rPr>
-              <a:t>Adoption readiness score</a:t>
+              <a:t>Implementation readiness score</a:t>
             </a:r>
           </a:p>
         </p:txBody>
@@ -22240,7 +22251,7 @@
         <p:spPr>
           <a:xfrm>
             <a:off x="8381746" y="2873502"/>
-            <a:ext cx="961447" cy="195579"/>
+            <a:ext cx="1405183" cy="195579"/>
           </a:xfrm>
           <a:prstGeom prst="rect">
             <a:avLst/>
@@ -22267,7 +22278,7 @@
                 <a:ea typeface="Malgun Gothic"/>
                 <a:cs typeface="Arial"/>
               </a:rPr>
-              <a:t>C Ticket triage</a:t>
+              <a:t>C Expense approvals</a:t>
             </a:r>
           </a:p>
         </p:txBody>
@@ -22681,8 +22692,8 @@
         </p:nvSpPr>
         <p:spPr>
           <a:xfrm>
-            <a:off x="812800" y="1422400"/>
-            <a:ext cx="2470150" cy="1624583"/>
+            <a:off x="965200" y="1422400"/>
+            <a:ext cx="2317750" cy="1624583"/>
           </a:xfrm>
           <a:prstGeom prst="rect">
             <a:avLst/>
@@ -22770,7 +22781,36 @@
       </p:sp>
       <p:sp>
         <p:nvSpPr>
-          <p:cNvPr id="6" name="Tag"/>
+          <p:cNvPr id="6" name="Commentary rule"/>
+          <p:cNvSpPr/>
+          <p:nvPr/>
+        </p:nvSpPr>
+        <p:spPr>
+          <a:xfrm>
+            <a:off x="812800" y="1422400"/>
+            <a:ext cx="25400" cy="1624583"/>
+          </a:xfrm>
+          <a:prstGeom prst="rect">
+            <a:avLst/>
+          </a:prstGeom>
+          <a:solidFill>
+            <a:srgbClr val="2F5BD3"/>
+          </a:solidFill>
+          <a:ln>
+            <a:noFill/>
+          </a:ln>
+        </p:spPr>
+        <p:txBody>
+          <a:bodyPr rtlCol="0" anchor="ctr" wrap="square" lIns="76200" tIns="76200" rIns="76200" bIns="76200"/>
+          <a:lstStyle/>
+          <a:p>
+            <a:pPr algn="ctr"/>
+          </a:p>
+        </p:txBody>
+      </p:sp>
+      <p:sp>
+        <p:nvSpPr>
+          <p:cNvPr id="7" name="Tag"/>
           <p:cNvSpPr/>
           <p:nvPr/>
         </p:nvSpPr>
@@ -22814,7 +22854,7 @@
       </p:sp>
       <p:sp>
         <p:nvSpPr>
-          <p:cNvPr id="7" name="Cell 1"/>
+          <p:cNvPr id="8" name="Cell 1"/>
           <p:cNvSpPr/>
           <p:nvPr/>
         </p:nvSpPr>
@@ -22843,7 +22883,7 @@
       </p:sp>
       <p:sp>
         <p:nvSpPr>
-          <p:cNvPr id="8" name="Cell 1 name"/>
+          <p:cNvPr id="9" name="Cell 1 name"/>
           <p:cNvSpPr txBox="1"/>
           <p:nvPr/>
         </p:nvSpPr>
@@ -22884,7 +22924,7 @@
       </p:sp>
       <p:sp>
         <p:nvSpPr>
-          <p:cNvPr id="9" name="Cell 2"/>
+          <p:cNvPr id="10" name="Cell 2"/>
           <p:cNvSpPr/>
           <p:nvPr/>
         </p:nvSpPr>
@@ -22913,7 +22953,7 @@
       </p:sp>
       <p:sp>
         <p:nvSpPr>
-          <p:cNvPr id="10" name="Cell 2 name"/>
+          <p:cNvPr id="11" name="Cell 2 name"/>
           <p:cNvSpPr txBox="1"/>
           <p:nvPr/>
         </p:nvSpPr>
@@ -22954,7 +22994,7 @@
       </p:sp>
       <p:sp>
         <p:nvSpPr>
-          <p:cNvPr id="11" name="Item Procurement"/>
+          <p:cNvPr id="12" name="Item Procurement"/>
           <p:cNvSpPr txBox="1"/>
           <p:nvPr/>
         </p:nvSpPr>
@@ -22999,7 +23039,7 @@
       </p:sp>
       <p:sp>
         <p:nvSpPr>
-          <p:cNvPr id="12" name="Cell 3"/>
+          <p:cNvPr id="13" name="Cell 3"/>
           <p:cNvSpPr/>
           <p:nvPr/>
         </p:nvSpPr>
@@ -23030,7 +23070,7 @@
       </p:sp>
       <p:sp>
         <p:nvSpPr>
-          <p:cNvPr id="13" name="Cell 3 name"/>
+          <p:cNvPr id="14" name="Cell 3 name"/>
           <p:cNvSpPr txBox="1"/>
           <p:nvPr/>
         </p:nvSpPr>
@@ -23071,7 +23111,7 @@
       </p:sp>
       <p:sp>
         <p:nvSpPr>
-          <p:cNvPr id="14" name="Item Finance"/>
+          <p:cNvPr id="15" name="Item Finance"/>
           <p:cNvSpPr txBox="1"/>
           <p:nvPr/>
         </p:nvSpPr>
@@ -23116,7 +23156,7 @@
       </p:sp>
       <p:sp>
         <p:nvSpPr>
-          <p:cNvPr id="15" name="Item Service desk"/>
+          <p:cNvPr id="16" name="Item Service desk"/>
           <p:cNvSpPr txBox="1"/>
           <p:nvPr/>
         </p:nvSpPr>
@@ -23161,7 +23201,7 @@
       </p:sp>
       <p:sp>
         <p:nvSpPr>
-          <p:cNvPr id="16" name="Cell 4"/>
+          <p:cNvPr id="17" name="Cell 4"/>
           <p:cNvSpPr/>
           <p:nvPr/>
         </p:nvSpPr>
@@ -23190,7 +23230,7 @@
       </p:sp>
       <p:sp>
         <p:nvSpPr>
-          <p:cNvPr id="17" name="Cell 4 name"/>
+          <p:cNvPr id="18" name="Cell 4 name"/>
           <p:cNvSpPr txBox="1"/>
           <p:nvPr/>
         </p:nvSpPr>
@@ -23231,7 +23271,7 @@
       </p:sp>
       <p:sp>
         <p:nvSpPr>
-          <p:cNvPr id="18" name="Item Legal"/>
+          <p:cNvPr id="19" name="Item Legal"/>
           <p:cNvSpPr txBox="1"/>
           <p:nvPr/>
         </p:nvSpPr>
@@ -23276,7 +23316,7 @@
       </p:sp>
       <p:sp>
         <p:nvSpPr>
-          <p:cNvPr id="19" name="Cell 5"/>
+          <p:cNvPr id="20" name="Cell 5"/>
           <p:cNvSpPr/>
           <p:nvPr/>
         </p:nvSpPr>
@@ -23305,7 +23345,7 @@
       </p:sp>
       <p:sp>
         <p:nvSpPr>
-          <p:cNvPr id="20" name="Cell 5 name"/>
+          <p:cNvPr id="21" name="Cell 5 name"/>
           <p:cNvSpPr txBox="1"/>
           <p:nvPr/>
         </p:nvSpPr>
@@ -23346,7 +23386,7 @@
       </p:sp>
       <p:sp>
         <p:nvSpPr>
-          <p:cNvPr id="21" name="Cell 6"/>
+          <p:cNvPr id="22" name="Cell 6"/>
           <p:cNvSpPr/>
           <p:nvPr/>
         </p:nvSpPr>
@@ -23375,7 +23415,7 @@
       </p:sp>
       <p:sp>
         <p:nvSpPr>
-          <p:cNvPr id="22" name="Cell 6 name"/>
+          <p:cNvPr id="23" name="Cell 6 name"/>
           <p:cNvSpPr txBox="1"/>
           <p:nvPr/>
         </p:nvSpPr>
@@ -23416,7 +23456,7 @@
       </p:sp>
       <p:sp>
         <p:nvSpPr>
-          <p:cNvPr id="23" name="Cell 7"/>
+          <p:cNvPr id="24" name="Cell 7"/>
           <p:cNvSpPr/>
           <p:nvPr/>
         </p:nvSpPr>
@@ -23445,7 +23485,7 @@
       </p:sp>
       <p:sp>
         <p:nvSpPr>
-          <p:cNvPr id="24" name="Cell 7 name"/>
+          <p:cNvPr id="25" name="Cell 7 name"/>
           <p:cNvSpPr txBox="1"/>
           <p:nvPr/>
         </p:nvSpPr>
@@ -23486,7 +23526,7 @@
       </p:sp>
       <p:sp>
         <p:nvSpPr>
-          <p:cNvPr id="25" name="Cell 8"/>
+          <p:cNvPr id="26" name="Cell 8"/>
           <p:cNvSpPr/>
           <p:nvPr/>
         </p:nvSpPr>
@@ -23515,7 +23555,7 @@
       </p:sp>
       <p:sp>
         <p:nvSpPr>
-          <p:cNvPr id="26" name="Cell 8 name"/>
+          <p:cNvPr id="27" name="Cell 8 name"/>
           <p:cNvSpPr txBox="1"/>
           <p:nvPr/>
         </p:nvSpPr>
@@ -23556,7 +23596,7 @@
       </p:sp>
       <p:sp>
         <p:nvSpPr>
-          <p:cNvPr id="27" name="Item Facilities"/>
+          <p:cNvPr id="28" name="Item Facilities"/>
           <p:cNvSpPr txBox="1"/>
           <p:nvPr/>
         </p:nvSpPr>
@@ -23601,7 +23641,7 @@
       </p:sp>
       <p:sp>
         <p:nvSpPr>
-          <p:cNvPr id="28" name="Cell 9"/>
+          <p:cNvPr id="29" name="Cell 9"/>
           <p:cNvSpPr/>
           <p:nvPr/>
         </p:nvSpPr>
@@ -23630,7 +23670,7 @@
       </p:sp>
       <p:sp>
         <p:nvSpPr>
-          <p:cNvPr id="29" name="Cell 9 name"/>
+          <p:cNvPr id="30" name="Cell 9 name"/>
           <p:cNvSpPr txBox="1"/>
           <p:nvPr/>
         </p:nvSpPr>
@@ -23671,7 +23711,7 @@
       </p:sp>
       <p:cxnSp>
         <p:nvCxnSpPr>
-          <p:cNvPr id="30" name="X axis"/>
+          <p:cNvPr id="31" name="X axis"/>
           <p:cNvCxnSpPr/>
           <p:nvPr/>
         </p:nvCxnSpPr>
@@ -23693,7 +23733,7 @@
       </p:cxnSp>
       <p:cxnSp>
         <p:nvCxnSpPr>
-          <p:cNvPr id="31" name="Y axis"/>
+          <p:cNvPr id="32" name="Y axis"/>
           <p:cNvCxnSpPr/>
           <p:nvPr/>
         </p:nvCxnSpPr>
@@ -23715,7 +23755,7 @@
       </p:cxnSp>
       <p:sp>
         <p:nvSpPr>
-          <p:cNvPr id="32" name="X axis left"/>
+          <p:cNvPr id="33" name="X axis left"/>
           <p:cNvSpPr txBox="1"/>
           <p:nvPr/>
         </p:nvSpPr>
@@ -23756,7 +23796,7 @@
       </p:sp>
       <p:sp>
         <p:nvSpPr>
-          <p:cNvPr id="33" name="X axis center"/>
+          <p:cNvPr id="34" name="X axis center"/>
           <p:cNvSpPr txBox="1"/>
           <p:nvPr/>
         </p:nvSpPr>
@@ -23797,7 +23837,7 @@
       </p:sp>
       <p:sp>
         <p:nvSpPr>
-          <p:cNvPr id="34" name="X axis right"/>
+          <p:cNvPr id="35" name="X axis right"/>
           <p:cNvSpPr txBox="1"/>
           <p:nvPr/>
         </p:nvSpPr>
@@ -23838,7 +23878,7 @@
       </p:sp>
       <p:sp>
         <p:nvSpPr>
-          <p:cNvPr id="35" name="Y axis left"/>
+          <p:cNvPr id="36" name="Y axis left"/>
           <p:cNvSpPr txBox="1"/>
           <p:nvPr/>
         </p:nvSpPr>
@@ -23879,7 +23919,7 @@
       </p:sp>
       <p:sp>
         <p:nvSpPr>
-          <p:cNvPr id="36" name="Y axis center"/>
+          <p:cNvPr id="37" name="Y axis center"/>
           <p:cNvSpPr txBox="1"/>
           <p:nvPr/>
         </p:nvSpPr>
@@ -23920,7 +23960,7 @@
       </p:sp>
       <p:sp>
         <p:nvSpPr>
-          <p:cNvPr id="37" name="Y axis right"/>
+          <p:cNvPr id="38" name="Y axis right"/>
           <p:cNvSpPr txBox="1"/>
           <p:nvPr/>
         </p:nvSpPr>
@@ -23961,7 +24001,7 @@
       </p:sp>
       <p:cxnSp>
         <p:nvCxnSpPr>
-          <p:cNvPr id="38" name="Footer rule"/>
+          <p:cNvPr id="39" name="Footer rule"/>
           <p:cNvCxnSpPr/>
           <p:nvPr/>
         </p:nvCxnSpPr>
@@ -23982,7 +24022,7 @@
       </p:cxnSp>
       <p:sp>
         <p:nvSpPr>
-          <p:cNvPr id="39" name="Page number"/>
+          <p:cNvPr id="40" name="Page number"/>
           <p:cNvSpPr txBox="1"/>
           <p:nvPr/>
         </p:nvSpPr>
